--- a/material/[SeSAC_YDP_6] 26_React_Event_handling.pptx
+++ b/material/[SeSAC_YDP_6] 26_React_Event_handling.pptx
@@ -210,7 +210,7 @@
           <a:p>
             <a:fld id="{2EF3F159-7250-4DD4-91C2-13B35D56E1AF}" type="datetimeFigureOut">
               <a:rPr lang="ko-KR" altLang="en-US" smtClean="0"/>
-              <a:t>2024-08-05</a:t>
+              <a:t>2025-01-05</a:t>
             </a:fld>
             <a:endParaRPr lang="ko-KR" altLang="en-US"/>
           </a:p>
@@ -2021,7 +2021,7 @@
           <a:p>
             <a:fld id="{0E19CB95-6D28-40F1-9DA3-1BAC5D4B5B4F}" type="datetime6">
               <a:rPr lang="ko-KR" altLang="en-US" smtClean="0"/>
-              <a:t>2024년 8월</a:t>
+              <a:t>2025년 1월</a:t>
             </a:fld>
             <a:endParaRPr lang="ko-KR" altLang="en-US"/>
           </a:p>
@@ -2401,7 +2401,7 @@
           <a:p>
             <a:fld id="{C4A39A32-5728-48B8-9F9C-437D214CCAF1}" type="datetime6">
               <a:rPr lang="ko-KR" altLang="en-US" smtClean="0"/>
-              <a:t>2024년 8월</a:t>
+              <a:t>2025년 1월</a:t>
             </a:fld>
             <a:endParaRPr lang="ko-KR" altLang="en-US"/>
           </a:p>
@@ -2603,7 +2603,7 @@
           <a:p>
             <a:fld id="{3BECC8BA-EBCB-4BF9-8E87-970CE0138376}" type="datetime6">
               <a:rPr lang="ko-KR" altLang="en-US" smtClean="0"/>
-              <a:t>2024년 8월</a:t>
+              <a:t>2025년 1월</a:t>
             </a:fld>
             <a:endParaRPr lang="ko-KR" altLang="en-US"/>
           </a:p>
@@ -2811,7 +2811,7 @@
           <a:p>
             <a:fld id="{7869FA6E-4699-4AC6-B2CB-4E60A58ED7A8}" type="datetime6">
               <a:rPr lang="ko-KR" altLang="en-US" smtClean="0"/>
-              <a:t>2024년 8월</a:t>
+              <a:t>2025년 1월</a:t>
             </a:fld>
             <a:endParaRPr lang="ko-KR" altLang="en-US"/>
           </a:p>
@@ -2924,7 +2924,7 @@
           <a:p>
             <a:fld id="{0E19CB95-6D28-40F1-9DA3-1BAC5D4B5B4F}" type="datetime6">
               <a:rPr lang="ko-KR" altLang="en-US" smtClean="0"/>
-              <a:t>2024년 8월</a:t>
+              <a:t>2025년 1월</a:t>
             </a:fld>
             <a:endParaRPr lang="ko-KR" altLang="en-US"/>
           </a:p>
@@ -3186,7 +3186,7 @@
           <a:p>
             <a:fld id="{3C9CE3CE-253F-4F9D-BA15-C226C8D8501E}" type="datetime6">
               <a:rPr lang="ko-KR" altLang="en-US" smtClean="0"/>
-              <a:t>2024년 8월</a:t>
+              <a:t>2025년 1월</a:t>
             </a:fld>
             <a:endParaRPr lang="ko-KR" altLang="en-US"/>
           </a:p>
@@ -3503,7 +3503,7 @@
           <a:p>
             <a:fld id="{BE5A7087-D460-46DD-B430-F8D9B9677D08}" type="datetime6">
               <a:rPr lang="ko-KR" altLang="en-US" smtClean="0"/>
-              <a:t>2024년 8월</a:t>
+              <a:t>2025년 1월</a:t>
             </a:fld>
             <a:endParaRPr lang="ko-KR" altLang="en-US"/>
           </a:p>
@@ -3772,7 +3772,7 @@
           <a:p>
             <a:fld id="{0581BA25-D675-4234-A003-8449BDEEF18E}" type="datetime6">
               <a:rPr lang="ko-KR" altLang="en-US" smtClean="0"/>
-              <a:t>2024년 8월</a:t>
+              <a:t>2025년 1월</a:t>
             </a:fld>
             <a:endParaRPr lang="ko-KR" altLang="en-US"/>
           </a:p>
@@ -4188,7 +4188,7 @@
           <a:p>
             <a:fld id="{26155C29-A87F-46F0-A24C-6C9F0A4BF6AA}" type="datetime6">
               <a:rPr lang="ko-KR" altLang="en-US" smtClean="0"/>
-              <a:t>2024년 8월</a:t>
+              <a:t>2025년 1월</a:t>
             </a:fld>
             <a:endParaRPr lang="ko-KR" altLang="en-US"/>
           </a:p>
@@ -4333,7 +4333,7 @@
           <a:p>
             <a:fld id="{DD2EDD62-8757-43DB-BAE0-460422B548EA}" type="datetime6">
               <a:rPr lang="ko-KR" altLang="en-US" smtClean="0"/>
-              <a:t>2024년 8월</a:t>
+              <a:t>2025년 1월</a:t>
             </a:fld>
             <a:endParaRPr lang="ko-KR" altLang="en-US"/>
           </a:p>
@@ -4446,7 +4446,7 @@
           <a:p>
             <a:fld id="{DC6A871B-4800-495F-AC75-93D44C7DEBA5}" type="datetime6">
               <a:rPr lang="ko-KR" altLang="en-US" smtClean="0"/>
-              <a:t>2024년 8월</a:t>
+              <a:t>2025년 1월</a:t>
             </a:fld>
             <a:endParaRPr lang="ko-KR" altLang="en-US"/>
           </a:p>
@@ -4757,7 +4757,7 @@
           <a:p>
             <a:fld id="{59605888-30A6-49BB-95E2-DEAE4E5B09E9}" type="datetime6">
               <a:rPr lang="ko-KR" altLang="en-US" smtClean="0"/>
-              <a:t>2024년 8월</a:t>
+              <a:t>2025년 1월</a:t>
             </a:fld>
             <a:endParaRPr lang="ko-KR" altLang="en-US"/>
           </a:p>
@@ -4998,7 +4998,7 @@
           <a:p>
             <a:fld id="{8691C14A-5735-4A8B-B68B-DEC1DC2A3813}" type="datetime6">
               <a:rPr lang="ko-KR" altLang="en-US" smtClean="0"/>
-              <a:t>2024년 8월</a:t>
+              <a:t>2025년 1월</a:t>
             </a:fld>
             <a:endParaRPr lang="ko-KR" altLang="en-US"/>
           </a:p>
@@ -5583,7 +5583,7 @@
           <a:p>
             <a:fld id="{4DA02FB7-A3D0-4BF4-B23F-90A4C3B73A56}" type="datetime6">
               <a:rPr lang="ko-KR" altLang="en-US" smtClean="0"/>
-              <a:t>2024년 8월</a:t>
+              <a:t>2025년 1월</a:t>
             </a:fld>
             <a:endParaRPr lang="ko-KR" altLang="en-US" dirty="0"/>
           </a:p>
@@ -5712,7 +5712,7 @@
           <a:p>
             <a:fld id="{0F78D9C4-20C1-4B15-A116-16DC77AD9A1E}" type="datetime1">
               <a:rPr lang="ko-KR" altLang="en-US" smtClean="0"/>
-              <a:t>2024-08-05</a:t>
+              <a:t>2025-01-05</a:t>
             </a:fld>
             <a:endParaRPr lang="ko-KR" altLang="en-US"/>
           </a:p>
@@ -6064,6 +6064,15 @@
               </a:rPr>
               <a:t>강의 클릭</a:t>
             </a:r>
+            <a:r>
+              <a:rPr lang="en-US" altLang="ko-KR" dirty="0">
+                <a:solidFill>
+                  <a:srgbClr val="212529"/>
+                </a:solidFill>
+                <a:latin typeface="+mn-ea"/>
+              </a:rPr>
+              <a:t/>
+            </a:r>
             <a:br>
               <a:rPr lang="en-US" altLang="ko-KR" dirty="0">
                 <a:solidFill>
@@ -6254,7 +6263,7 @@
           <a:p>
             <a:fld id="{F5DECA0C-8384-4A80-8CAF-F40503FCCF4C}" type="datetime6">
               <a:rPr lang="ko-KR" altLang="en-US" smtClean="0"/>
-              <a:t>2024년 8월</a:t>
+              <a:t>2025년 1월</a:t>
             </a:fld>
             <a:endParaRPr lang="ko-KR" altLang="en-US"/>
           </a:p>
@@ -6506,7 +6515,7 @@
           <a:p>
             <a:fld id="{0E19CB95-6D28-40F1-9DA3-1BAC5D4B5B4F}" type="datetime6">
               <a:rPr lang="ko-KR" altLang="en-US" smtClean="0"/>
-              <a:t>2024년 8월</a:t>
+              <a:t>2025년 1월</a:t>
             </a:fld>
             <a:endParaRPr lang="ko-KR" altLang="en-US"/>
           </a:p>
@@ -6668,7 +6677,7 @@
           <a:p>
             <a:fld id="{7AFDD245-6FC9-4BCD-9848-9FACA08CE32D}" type="datetime6">
               <a:rPr lang="ko-KR" altLang="en-US" smtClean="0"/>
-              <a:t>2024년 8월</a:t>
+              <a:t>2025년 1월</a:t>
             </a:fld>
             <a:endParaRPr lang="ko-KR" altLang="en-US"/>
           </a:p>
@@ -6887,6 +6896,10 @@
               <a:rPr lang="ko-KR" altLang="en-US" dirty="0"/>
               <a:t>를 사용</a:t>
             </a:r>
+            <a:r>
+              <a:rPr lang="en-US" altLang="ko-KR" dirty="0"/>
+              <a:t/>
+            </a:r>
             <a:br>
               <a:rPr lang="en-US" altLang="ko-KR" dirty="0"/>
             </a:br>
@@ -6926,6 +6939,10 @@
             <a:r>
               <a:rPr lang="ko-KR" altLang="en-US" dirty="0"/>
               <a:t> 전달</a:t>
+            </a:r>
+            <a:r>
+              <a:rPr lang="en-US" altLang="ko-KR" dirty="0"/>
+              <a:t/>
             </a:r>
             <a:br>
               <a:rPr lang="en-US" altLang="ko-KR" dirty="0"/>
@@ -7016,7 +7033,7 @@
           <a:p>
             <a:fld id="{7C4FB1EE-E7B1-4C9E-8657-7267753DFD72}" type="datetime6">
               <a:rPr lang="ko-KR" altLang="en-US" smtClean="0"/>
-              <a:t>2024년 8월</a:t>
+              <a:t>2025년 1월</a:t>
             </a:fld>
             <a:endParaRPr lang="ko-KR" altLang="en-US"/>
           </a:p>
@@ -7383,7 +7400,7 @@
           <a:p>
             <a:fld id="{5704CCD4-02AF-4FAB-9662-016ADDF90A58}" type="datetime6">
               <a:rPr lang="ko-KR" altLang="en-US" smtClean="0"/>
-              <a:t>2024년 8월</a:t>
+              <a:t>2025년 1월</a:t>
             </a:fld>
             <a:endParaRPr lang="ko-KR" altLang="en-US"/>
           </a:p>
@@ -7843,7 +7860,7 @@
           <a:p>
             <a:fld id="{9E092EB6-6BAC-455A-B68D-8451BA06159C}" type="datetime6">
               <a:rPr lang="ko-KR" altLang="en-US" smtClean="0"/>
-              <a:t>2024년 8월</a:t>
+              <a:t>2025년 1월</a:t>
             </a:fld>
             <a:endParaRPr lang="ko-KR" altLang="en-US"/>
           </a:p>
@@ -8052,7 +8069,7 @@
           <a:p>
             <a:fld id="{2E35068E-430D-4BE5-8CE2-117F88CCC3A1}" type="datetime6">
               <a:rPr lang="ko-KR" altLang="en-US" smtClean="0"/>
-              <a:t>2024년 8월</a:t>
+              <a:t>2025년 1월</a:t>
             </a:fld>
             <a:endParaRPr lang="ko-KR" altLang="en-US"/>
           </a:p>
@@ -8312,7 +8329,7 @@
           <a:p>
             <a:fld id="{81425F84-7286-4CA9-8454-9C0AD804DE0A}" type="datetime6">
               <a:rPr lang="ko-KR" altLang="en-US" smtClean="0"/>
-              <a:t>2024년 8월</a:t>
+              <a:t>2025년 1월</a:t>
             </a:fld>
             <a:endParaRPr lang="ko-KR" altLang="en-US"/>
           </a:p>
@@ -8528,7 +8545,7 @@
           <a:p>
             <a:fld id="{9E092EB6-6BAC-455A-B68D-8451BA06159C}" type="datetime6">
               <a:rPr lang="ko-KR" altLang="en-US" smtClean="0"/>
-              <a:t>2024년 8월</a:t>
+              <a:t>2025년 1월</a:t>
             </a:fld>
             <a:endParaRPr lang="ko-KR" altLang="en-US"/>
           </a:p>
